--- a/lecture-slides_upload/lecture/mixed-fx-lab.pptx
+++ b/lecture-slides_upload/lecture/mixed-fx-lab.pptx
@@ -8760,12 +8760,8 @@
           <a:p>
             <a:pPr lvl="1"/>
             <a:r>
-              <a:rPr lang="en-US"/>
-              <a:t>“no pooling” </a:t>
-            </a:r>
-            <a:r>
               <a:rPr lang="en-US" dirty="0"/>
-              <a:t>– run separate regressions in each neighborhood</a:t>
+              <a:t>“no pooling” – run separate regressions in each neighborhood</a:t>
             </a:r>
           </a:p>
           <a:p>
@@ -8975,7 +8971,14 @@
             <a:pPr lvl="1"/>
             <a:r>
               <a:rPr lang="en-US" dirty="0"/>
-              <a:t>“partial pooling” – include random effects (clustering) information in the model this is the linear mixed model (multilevel) approach </a:t>
+              <a:t>“partial pooling” – include random effects (clustering) information in the model.</a:t>
+            </a:r>
+          </a:p>
+          <a:p>
+            <a:pPr lvl="2"/>
+            <a:r>
+              <a:rPr lang="en-US" dirty="0"/>
+              <a:t> this is the linear mixed model (multilevel) approach </a:t>
             </a:r>
           </a:p>
           <a:p>
@@ -9167,7 +9170,7 @@
           <a:p>
             <a:r>
               <a:rPr lang="en-US" dirty="0"/>
-              <a:t>imbalances are handled differently (i.e., not handled in the ”no pooling approach”)</a:t>
+              <a:t>imbalances are handled differently (i.e., not handled in the “no pooling approach”)</a:t>
             </a:r>
           </a:p>
           <a:p>
@@ -9559,7 +9562,7 @@
           <a:p>
             <a:r>
               <a:rPr lang="en-US" dirty="0"/>
-              <a:t>captures variance (e.g. trial-to-trial) that may be important for accurately estimating effects of interest</a:t>
+              <a:t>captures variance (e.g. trial-to-trial) that may be important for accurately estimating effects of interest – see e.g. “Simpson’s Paradox”</a:t>
             </a:r>
           </a:p>
           <a:p>
